--- a/classes/parte-1-redes-y-seguridad-de-redes/033-enumeracion-de-servicios-de-red/clase-033-presentacion.pptx
+++ b/classes/parte-1-redes-y-seguridad-de-redes/033-enumeracion-de-servicios-de-red/clase-033-presentacion.pptx
@@ -17,6 +17,9 @@
     <p:sldId id="265" r:id="rId16"/>
     <p:sldId id="266" r:id="rId17"/>
     <p:sldId id="267" r:id="rId18"/>
+    <p:sldId id="268" r:id="rId19"/>
+    <p:sldId id="269" r:id="rId20"/>
+    <p:sldId id="270" r:id="rId21"/>
   </p:sldIdLst>
   <p:sldSz cx="9144000" cy="6858000" type="screen4x3"/>
   <p:notesSz cx="6858000" cy="9144000"/>
@@ -3198,7 +3201,7 @@
                   <a:srgbClr val="0B3D2E"/>
                 </a:solidFill>
               </a:rPr>
-              <a:t>⚠️ Errores comunes</a:t>
+              <a:t>✍️ Ejercicios</a:t>
             </a:r>
           </a:p>
         </p:txBody>
@@ -3236,67 +3239,82 @@
                   <a:srgbClr val="22282E"/>
                 </a:solidFill>
               </a:rPr>
-              <a:t>•  smbclient "NTSTATUSACCESSDENIED" — El recurso requiere credenciales; prueba null session -N o busca credenciales válidas</a:t>
-            </a:r>
-          </a:p>
-          <a:p>
-            <a:pPr>
-              <a:spcAft>
-                <a:spcPts val="600"/>
-              </a:spcAft>
-            </a:pPr>
-            <a:r>
-              <a:rPr sz="1500">
-                <a:solidFill>
-                  <a:srgbClr val="22282E"/>
-                </a:solidFill>
-              </a:rPr>
-              <a:t>•  gobuster devuelve todo 200/403 igual — Falta filtrar por código o tamaño; usa -b para excluir códigos o --exclude-length</a:t>
-            </a:r>
-          </a:p>
-          <a:p>
-            <a:pPr>
-              <a:spcAft>
-                <a:spcPts val="600"/>
-              </a:spcAft>
-            </a:pPr>
-            <a:r>
-              <a:rPr sz="1500">
-                <a:solidFill>
-                  <a:srgbClr val="22282E"/>
-                </a:solidFill>
-              </a:rPr>
-              <a:t>•  AXFR "Transfer failed" — La transferencia de zona está (correctamente) restringida; no es un fallo, es una buena práctica del servidor</a:t>
-            </a:r>
-          </a:p>
-          <a:p>
-            <a:pPr>
-              <a:spcAft>
-                <a:spcPts val="600"/>
-              </a:spcAft>
-            </a:pPr>
-            <a:r>
-              <a:rPr sz="1500">
-                <a:solidFill>
-                  <a:srgbClr val="22282E"/>
-                </a:solidFill>
-              </a:rPr>
-              <a:t>•  snmpwalk sin respuesta — Community string incorrecta o SNMP filtrado; prueba public/private o versiones distintas</a:t>
-            </a:r>
-          </a:p>
-          <a:p>
-            <a:pPr>
-              <a:spcAft>
-                <a:spcPts val="600"/>
-              </a:spcAft>
-            </a:pPr>
-            <a:r>
-              <a:rPr sz="1500">
-                <a:solidFill>
-                  <a:srgbClr val="22282E"/>
-                </a:solidFill>
-              </a:rPr>
-              <a:t>•  enum4linux muy lento — Muchas comprobaciones; usa opciones selectivas en lugar de -A</a:t>
+              <a:t>•  Enumera los recursos SMB del objetivo y determina cuáles permiten acceso anónimo.</a:t>
+            </a:r>
+          </a:p>
+          <a:p>
+            <a:pPr>
+              <a:spcAft>
+                <a:spcPts val="600"/>
+              </a:spcAft>
+            </a:pPr>
+            <a:r>
+              <a:rPr sz="1500">
+                <a:solidFill>
+                  <a:srgbClr val="22282E"/>
+                </a:solidFill>
+              </a:rPr>
+              <a:t>•  Con gobuster, encuentra al menos dos directorios no enlazados desde la página principal.</a:t>
+            </a:r>
+          </a:p>
+          <a:p>
+            <a:pPr>
+              <a:spcAft>
+                <a:spcPts val="600"/>
+              </a:spcAft>
+            </a:pPr>
+            <a:r>
+              <a:rPr sz="1500">
+                <a:solidFill>
+                  <a:srgbClr val="22282E"/>
+                </a:solidFill>
+              </a:rPr>
+              <a:t>•  Intenta una transferencia de zona AXFR y explica el riesgo si tiene éxito.</a:t>
+            </a:r>
+          </a:p>
+          <a:p>
+            <a:pPr>
+              <a:spcAft>
+                <a:spcPts val="600"/>
+              </a:spcAft>
+            </a:pPr>
+            <a:r>
+              <a:rPr sz="1500">
+                <a:solidFill>
+                  <a:srgbClr val="22282E"/>
+                </a:solidFill>
+              </a:rPr>
+              <a:t>•  Haz snmpwalk y localiza el nombre del sistema y la tabla de procesos.</a:t>
+            </a:r>
+          </a:p>
+          <a:p>
+            <a:pPr>
+              <a:spcAft>
+                <a:spcPts val="600"/>
+              </a:spcAft>
+            </a:pPr>
+            <a:r>
+              <a:rPr sz="1500">
+                <a:solidFill>
+                  <a:srgbClr val="22282E"/>
+                </a:solidFill>
+              </a:rPr>
+              <a:t>•  Enumera usuarios por SMTP con VRFY y explica por qué muchos servidores lo desactivan.</a:t>
+            </a:r>
+          </a:p>
+          <a:p>
+            <a:pPr>
+              <a:spcAft>
+                <a:spcPts val="600"/>
+              </a:spcAft>
+            </a:pPr>
+            <a:r>
+              <a:rPr sz="1500">
+                <a:solidFill>
+                  <a:srgbClr val="22282E"/>
+                </a:solidFill>
+              </a:rPr>
+              <a:t>•  Usa whatweb y curl -I para inventariar el stack tecnológico de un sitio.</a:t>
             </a:r>
           </a:p>
         </p:txBody>
@@ -3347,7 +3365,7 @@
                   <a:srgbClr val="0B3D2E"/>
                 </a:solidFill>
               </a:rPr>
-              <a:t>❓ Preguntas frecuentes</a:t>
+              <a:t>📝 Reto verificable</a:t>
             </a:r>
           </a:p>
         </p:txBody>
@@ -3385,97 +3403,22 @@
                   <a:srgbClr val="22282E"/>
                 </a:solidFill>
               </a:rPr>
-              <a:t>•  ❓ ¿Por qué SMB da tanta información?</a:t>
-            </a:r>
-          </a:p>
-          <a:p>
-            <a:pPr>
-              <a:spcAft>
-                <a:spcPts val="600"/>
-              </a:spcAft>
-            </a:pPr>
-            <a:r>
-              <a:rPr sz="1500">
-                <a:solidFill>
-                  <a:srgbClr val="22282E"/>
-                </a:solidFill>
-              </a:rPr>
-              <a:t>•  Porque en redes Windows expone recursos, usuarios, políticas y el SO por diseño. Mal configurado (null sessions), regala un mapa de la organización.</a:t>
-            </a:r>
-          </a:p>
-          <a:p>
-            <a:pPr>
-              <a:spcAft>
-                <a:spcPts val="600"/>
-              </a:spcAft>
-            </a:pPr>
-            <a:r>
-              <a:rPr sz="1500">
-                <a:solidFill>
-                  <a:srgbClr val="22282E"/>
-                </a:solidFill>
-              </a:rPr>
-              <a:t>•  ❓ ¿Enumeración y escaneo son lo mismo?</a:t>
-            </a:r>
-          </a:p>
-          <a:p>
-            <a:pPr>
-              <a:spcAft>
-                <a:spcPts val="600"/>
-              </a:spcAft>
-            </a:pPr>
-            <a:r>
-              <a:rPr sz="1500">
-                <a:solidFill>
-                  <a:srgbClr val="22282E"/>
-                </a:solidFill>
-              </a:rPr>
-              <a:t>•  No. El escaneo dice qué hay (puertos/servicios); la enumeración interactúa con cada servicio para extraer información detallada y utilizable.</a:t>
-            </a:r>
-          </a:p>
-          <a:p>
-            <a:pPr>
-              <a:spcAft>
-                <a:spcPts val="600"/>
-              </a:spcAft>
-            </a:pPr>
-            <a:r>
-              <a:rPr sz="1500">
-                <a:solidFill>
-                  <a:srgbClr val="22282E"/>
-                </a:solidFill>
-              </a:rPr>
-              <a:t>•  ❓ ¿La enumeración es detectable?</a:t>
-            </a:r>
-          </a:p>
-          <a:p>
-            <a:pPr>
-              <a:spcAft>
-                <a:spcPts val="600"/>
-              </a:spcAft>
-            </a:pPr>
-            <a:r>
-              <a:rPr sz="1500">
-                <a:solidFill>
-                  <a:srgbClr val="22282E"/>
-                </a:solidFill>
-              </a:rPr>
-              <a:t>•  Mucho. Genera numerosas conexiones y peticiones que un IDS/SIEM registra. Por eso solo se hace dentro del alcance autorizado.</a:t>
-            </a:r>
-          </a:p>
-          <a:p>
-            <a:pPr>
-              <a:spcAft>
-                <a:spcPts val="600"/>
-              </a:spcAft>
-            </a:pPr>
-            <a:r>
-              <a:rPr sz="1500">
-                <a:solidFill>
-                  <a:srgbClr val="22282E"/>
-                </a:solidFill>
-              </a:rPr>
-              <a:t>•  ❓ ¿Qué hago con tanta información?</a:t>
+              <a:t>•  Elabora una "hoja de enumeración" de un host multiservicio de laboratorio que documente, por cada servicio abierto: versión, información sensible obtenida (recursos, usuarios, registros, directorios)…</a:t>
+            </a:r>
+          </a:p>
+          <a:p>
+            <a:pPr>
+              <a:spcAft>
+                <a:spcPts val="600"/>
+              </a:spcAft>
+            </a:pPr>
+            <a:r>
+              <a:rPr sz="1500">
+                <a:solidFill>
+                  <a:srgbClr val="22282E"/>
+                </a:solidFill>
+              </a:rPr>
+              <a:t>•  Criterio de aceptación: la hoja cubre todos los servicios abiertos que el revisor conoce, cada hallazgo es reproducible con el comando indicado y el vector priorizado es coherente con la información…</a:t>
             </a:r>
           </a:p>
         </p:txBody>
@@ -3526,7 +3469,7 @@
                   <a:srgbClr val="0B3D2E"/>
                 </a:solidFill>
               </a:rPr>
-              <a:t>🔗 Referencias</a:t>
+              <a:t>⚠️ Errores comunes</a:t>
             </a:r>
           </a:p>
         </p:txBody>
@@ -3564,6 +3507,334 @@
                   <a:srgbClr val="22282E"/>
                 </a:solidFill>
               </a:rPr>
+              <a:t>•  smbclient "NTSTATUSACCESSDENIED" — El recurso requiere credenciales; prueba null session -N o busca credenciales válidas</a:t>
+            </a:r>
+          </a:p>
+          <a:p>
+            <a:pPr>
+              <a:spcAft>
+                <a:spcPts val="600"/>
+              </a:spcAft>
+            </a:pPr>
+            <a:r>
+              <a:rPr sz="1500">
+                <a:solidFill>
+                  <a:srgbClr val="22282E"/>
+                </a:solidFill>
+              </a:rPr>
+              <a:t>•  gobuster devuelve todo 200/403 igual — Falta filtrar por código o tamaño; usa -b para excluir códigos o --exclude-length</a:t>
+            </a:r>
+          </a:p>
+          <a:p>
+            <a:pPr>
+              <a:spcAft>
+                <a:spcPts val="600"/>
+              </a:spcAft>
+            </a:pPr>
+            <a:r>
+              <a:rPr sz="1500">
+                <a:solidFill>
+                  <a:srgbClr val="22282E"/>
+                </a:solidFill>
+              </a:rPr>
+              <a:t>•  AXFR "Transfer failed" — La transferencia de zona está (correctamente) restringida; no es un fallo, es una buena práctica del servidor</a:t>
+            </a:r>
+          </a:p>
+          <a:p>
+            <a:pPr>
+              <a:spcAft>
+                <a:spcPts val="600"/>
+              </a:spcAft>
+            </a:pPr>
+            <a:r>
+              <a:rPr sz="1500">
+                <a:solidFill>
+                  <a:srgbClr val="22282E"/>
+                </a:solidFill>
+              </a:rPr>
+              <a:t>•  snmpwalk sin respuesta — Community string incorrecta o SNMP filtrado; prueba public/private o versiones distintas</a:t>
+            </a:r>
+          </a:p>
+          <a:p>
+            <a:pPr>
+              <a:spcAft>
+                <a:spcPts val="600"/>
+              </a:spcAft>
+            </a:pPr>
+            <a:r>
+              <a:rPr sz="1500">
+                <a:solidFill>
+                  <a:srgbClr val="22282E"/>
+                </a:solidFill>
+              </a:rPr>
+              <a:t>•  enum4linux muy lento — Muchas comprobaciones; usa opciones selectivas en lugar de -A</a:t>
+            </a:r>
+          </a:p>
+        </p:txBody>
+      </p:sp>
+    </p:spTree>
+  </p:cSld>
+  <p:clrMapOvr>
+    <a:masterClrMapping/>
+  </p:clrMapOvr>
+</p:sld>
+</file>
+
+<file path=ppt/slides/slide13.xml><?xml version="1.0" encoding="utf-8"?>
+<p:sld xmlns:a="http://schemas.openxmlformats.org/drawingml/2006/main" xmlns:p="http://schemas.openxmlformats.org/presentationml/2006/main" xmlns:r="http://schemas.openxmlformats.org/officeDocument/2006/relationships">
+  <p:cSld>
+    <p:spTree>
+      <p:nvGrpSpPr>
+        <p:cNvPr id="1" name=""/>
+        <p:cNvGrpSpPr/>
+        <p:nvPr/>
+      </p:nvGrpSpPr>
+      <p:grpSpPr/>
+      <p:sp>
+        <p:nvSpPr>
+          <p:cNvPr id="2" name="TextBox 1"/>
+          <p:cNvSpPr txBox="1"/>
+          <p:nvPr/>
+        </p:nvSpPr>
+        <p:spPr>
+          <a:xfrm>
+            <a:off x="457200" y="320040"/>
+            <a:ext cx="8229600" cy="822960"/>
+          </a:xfrm>
+          <a:prstGeom prst="rect">
+            <a:avLst/>
+          </a:prstGeom>
+          <a:noFill/>
+        </p:spPr>
+        <p:txBody>
+          <a:bodyPr wrap="square">
+            <a:spAutoFit/>
+          </a:bodyPr>
+          <a:lstStyle/>
+          <a:p>
+            <a:r>
+              <a:rPr sz="2600" b="1">
+                <a:solidFill>
+                  <a:srgbClr val="0B3D2E"/>
+                </a:solidFill>
+              </a:rPr>
+              <a:t>❓ Preguntas frecuentes</a:t>
+            </a:r>
+          </a:p>
+        </p:txBody>
+      </p:sp>
+      <p:sp>
+        <p:nvSpPr>
+          <p:cNvPr id="3" name="TextBox 2"/>
+          <p:cNvSpPr txBox="1"/>
+          <p:nvPr/>
+        </p:nvSpPr>
+        <p:spPr>
+          <a:xfrm>
+            <a:off x="457200" y="1280160"/>
+            <a:ext cx="8229600" cy="4937760"/>
+          </a:xfrm>
+          <a:prstGeom prst="rect">
+            <a:avLst/>
+          </a:prstGeom>
+          <a:noFill/>
+        </p:spPr>
+        <p:txBody>
+          <a:bodyPr wrap="square">
+            <a:spAutoFit/>
+          </a:bodyPr>
+          <a:lstStyle/>
+          <a:p>
+            <a:pPr>
+              <a:spcAft>
+                <a:spcPts val="600"/>
+              </a:spcAft>
+            </a:pPr>
+            <a:r>
+              <a:rPr sz="1500">
+                <a:solidFill>
+                  <a:srgbClr val="22282E"/>
+                </a:solidFill>
+              </a:rPr>
+              <a:t>•  ❓ ¿Por qué SMB da tanta información?</a:t>
+            </a:r>
+          </a:p>
+          <a:p>
+            <a:pPr>
+              <a:spcAft>
+                <a:spcPts val="600"/>
+              </a:spcAft>
+            </a:pPr>
+            <a:r>
+              <a:rPr sz="1500">
+                <a:solidFill>
+                  <a:srgbClr val="22282E"/>
+                </a:solidFill>
+              </a:rPr>
+              <a:t>•  Porque en redes Windows expone recursos, usuarios, políticas y el SO por diseño. Mal configurado (null sessions), regala un mapa de la organización.</a:t>
+            </a:r>
+          </a:p>
+          <a:p>
+            <a:pPr>
+              <a:spcAft>
+                <a:spcPts val="600"/>
+              </a:spcAft>
+            </a:pPr>
+            <a:r>
+              <a:rPr sz="1500">
+                <a:solidFill>
+                  <a:srgbClr val="22282E"/>
+                </a:solidFill>
+              </a:rPr>
+              <a:t>•  ❓ ¿Enumeración y escaneo son lo mismo?</a:t>
+            </a:r>
+          </a:p>
+          <a:p>
+            <a:pPr>
+              <a:spcAft>
+                <a:spcPts val="600"/>
+              </a:spcAft>
+            </a:pPr>
+            <a:r>
+              <a:rPr sz="1500">
+                <a:solidFill>
+                  <a:srgbClr val="22282E"/>
+                </a:solidFill>
+              </a:rPr>
+              <a:t>•  No. El escaneo dice qué hay (puertos/servicios); la enumeración interactúa con cada servicio para extraer información detallada y utilizable.</a:t>
+            </a:r>
+          </a:p>
+          <a:p>
+            <a:pPr>
+              <a:spcAft>
+                <a:spcPts val="600"/>
+              </a:spcAft>
+            </a:pPr>
+            <a:r>
+              <a:rPr sz="1500">
+                <a:solidFill>
+                  <a:srgbClr val="22282E"/>
+                </a:solidFill>
+              </a:rPr>
+              <a:t>•  ❓ ¿La enumeración es detectable?</a:t>
+            </a:r>
+          </a:p>
+          <a:p>
+            <a:pPr>
+              <a:spcAft>
+                <a:spcPts val="600"/>
+              </a:spcAft>
+            </a:pPr>
+            <a:r>
+              <a:rPr sz="1500">
+                <a:solidFill>
+                  <a:srgbClr val="22282E"/>
+                </a:solidFill>
+              </a:rPr>
+              <a:t>•  Mucho. Genera numerosas conexiones y peticiones que un IDS/SIEM registra. Por eso solo se hace dentro del alcance autorizado.</a:t>
+            </a:r>
+          </a:p>
+          <a:p>
+            <a:pPr>
+              <a:spcAft>
+                <a:spcPts val="600"/>
+              </a:spcAft>
+            </a:pPr>
+            <a:r>
+              <a:rPr sz="1500">
+                <a:solidFill>
+                  <a:srgbClr val="22282E"/>
+                </a:solidFill>
+              </a:rPr>
+              <a:t>•  ❓ ¿Qué hago con tanta información?</a:t>
+            </a:r>
+          </a:p>
+        </p:txBody>
+      </p:sp>
+    </p:spTree>
+  </p:cSld>
+  <p:clrMapOvr>
+    <a:masterClrMapping/>
+  </p:clrMapOvr>
+</p:sld>
+</file>
+
+<file path=ppt/slides/slide14.xml><?xml version="1.0" encoding="utf-8"?>
+<p:sld xmlns:a="http://schemas.openxmlformats.org/drawingml/2006/main" xmlns:p="http://schemas.openxmlformats.org/presentationml/2006/main" xmlns:r="http://schemas.openxmlformats.org/officeDocument/2006/relationships">
+  <p:cSld>
+    <p:spTree>
+      <p:nvGrpSpPr>
+        <p:cNvPr id="1" name=""/>
+        <p:cNvGrpSpPr/>
+        <p:nvPr/>
+      </p:nvGrpSpPr>
+      <p:grpSpPr/>
+      <p:sp>
+        <p:nvSpPr>
+          <p:cNvPr id="2" name="TextBox 1"/>
+          <p:cNvSpPr txBox="1"/>
+          <p:nvPr/>
+        </p:nvSpPr>
+        <p:spPr>
+          <a:xfrm>
+            <a:off x="457200" y="320040"/>
+            <a:ext cx="8229600" cy="822960"/>
+          </a:xfrm>
+          <a:prstGeom prst="rect">
+            <a:avLst/>
+          </a:prstGeom>
+          <a:noFill/>
+        </p:spPr>
+        <p:txBody>
+          <a:bodyPr wrap="square">
+            <a:spAutoFit/>
+          </a:bodyPr>
+          <a:lstStyle/>
+          <a:p>
+            <a:r>
+              <a:rPr sz="2600" b="1">
+                <a:solidFill>
+                  <a:srgbClr val="0B3D2E"/>
+                </a:solidFill>
+              </a:rPr>
+              <a:t>🔗 Referencias</a:t>
+            </a:r>
+          </a:p>
+        </p:txBody>
+      </p:sp>
+      <p:sp>
+        <p:nvSpPr>
+          <p:cNvPr id="3" name="TextBox 2"/>
+          <p:cNvSpPr txBox="1"/>
+          <p:nvPr/>
+        </p:nvSpPr>
+        <p:spPr>
+          <a:xfrm>
+            <a:off x="457200" y="1280160"/>
+            <a:ext cx="8229600" cy="4937760"/>
+          </a:xfrm>
+          <a:prstGeom prst="rect">
+            <a:avLst/>
+          </a:prstGeom>
+          <a:noFill/>
+        </p:spPr>
+        <p:txBody>
+          <a:bodyPr wrap="square">
+            <a:spAutoFit/>
+          </a:bodyPr>
+          <a:lstStyle/>
+          <a:p>
+            <a:pPr>
+              <a:spcAft>
+                <a:spcPts val="600"/>
+              </a:spcAft>
+            </a:pPr>
+            <a:r>
+              <a:rPr sz="1500">
+                <a:solidFill>
+                  <a:srgbClr val="22282E"/>
+                </a:solidFill>
+              </a:rPr>
               <a:t>•  Nmap NSE scripts (smb-, http-, dns-). &lt;https://nmap.org/nsedoc/&gt;</a:t>
             </a:r>
           </a:p>
@@ -3614,6 +3885,81 @@
           </a:p>
         </p:txBody>
       </p:sp>
+    </p:spTree>
+  </p:cSld>
+  <p:clrMapOvr>
+    <a:masterClrMapping/>
+  </p:clrMapOvr>
+</p:sld>
+</file>
+
+<file path=ppt/slides/slide15.xml><?xml version="1.0" encoding="utf-8"?>
+<p:sld xmlns:a="http://schemas.openxmlformats.org/drawingml/2006/main" xmlns:p="http://schemas.openxmlformats.org/presentationml/2006/main" xmlns:r="http://schemas.openxmlformats.org/officeDocument/2006/relationships">
+  <p:cSld>
+    <p:spTree>
+      <p:nvGrpSpPr>
+        <p:cNvPr id="1" name=""/>
+        <p:cNvGrpSpPr/>
+        <p:nvPr/>
+      </p:nvGrpSpPr>
+      <p:grpSpPr/>
+      <p:sp>
+        <p:nvSpPr>
+          <p:cNvPr id="2" name="TextBox 1"/>
+          <p:cNvSpPr txBox="1"/>
+          <p:nvPr/>
+        </p:nvSpPr>
+        <p:spPr>
+          <a:xfrm>
+            <a:off x="457200" y="274320"/>
+            <a:ext cx="8229600" cy="640080"/>
+          </a:xfrm>
+          <a:prstGeom prst="rect">
+            <a:avLst/>
+          </a:prstGeom>
+          <a:noFill/>
+        </p:spPr>
+        <p:txBody>
+          <a:bodyPr wrap="square">
+            <a:spAutoFit/>
+          </a:bodyPr>
+          <a:lstStyle/>
+          <a:p>
+            <a:r>
+              <a:rPr sz="2200" b="1">
+                <a:solidFill>
+                  <a:srgbClr val="0B3D2E"/>
+                </a:solidFill>
+              </a:rPr>
+              <a:t>Diagrama de la clase</a:t>
+            </a:r>
+          </a:p>
+        </p:txBody>
+      </p:sp>
+      <p:pic>
+        <p:nvPicPr>
+          <p:cNvPr id="3" name="Picture 2" descr="0f7edecab80af63d.png"/>
+          <p:cNvPicPr>
+            <a:picLocks noChangeAspect="1"/>
+          </p:cNvPicPr>
+          <p:nvPr/>
+        </p:nvPicPr>
+        <p:blipFill>
+          <a:blip r:embed="rId2"/>
+          <a:stretch>
+            <a:fillRect/>
+          </a:stretch>
+        </p:blipFill>
+        <p:spPr>
+          <a:xfrm>
+            <a:off x="457200" y="3415284"/>
+            <a:ext cx="8229600" cy="667512"/>
+          </a:xfrm>
+          <a:prstGeom prst="rect">
+            <a:avLst/>
+          </a:prstGeom>
+        </p:spPr>
+      </p:pic>
     </p:spTree>
   </p:cSld>
   <p:clrMapOvr>
@@ -3698,7 +4044,7 @@
                   <a:srgbClr val="22282E"/>
                 </a:solidFill>
               </a:rPr>
-              <a:t>•  Profundizar la fase de enumeración: una vez identificados puertos y versiones, extraer toda la información útil de cada servicio (SMB, HTTP, DNS, SMTP, SNMP, FTP, LDAP) con herramientas especializadas. La enumeración exhaustiva es lo que separa un escaneo superficial de una evaluación real, y suele ser la fase que más hallazgos produce.</a:t>
+              <a:t>•  Profundizar la fase de enumeración: una vez identificados puertos y versiones, extraer toda la información útil de cada servicio (SMB, HTTP, DNS, SMTP, SNMP, FTP, LDAP) con herramientas…</a:t>
             </a:r>
           </a:p>
         </p:txBody>
@@ -4107,7 +4453,7 @@
                   <a:srgbClr val="0B3D2E"/>
                 </a:solidFill>
               </a:rPr>
-              <a:t>📖 Definiciones y características</a:t>
+              <a:t>🧠 Explicación en profundidad</a:t>
             </a:r>
           </a:p>
         </p:txBody>
@@ -4145,67 +4491,97 @@
                   <a:srgbClr val="22282E"/>
                 </a:solidFill>
               </a:rPr>
-              <a:t>•  Enumeración: proceso de interactuar con un servicio para extraer información detallada (usuarios, recursos, versiones, configuración) más allá de saber que existe.</a:t>
-            </a:r>
-          </a:p>
-          <a:p>
-            <a:pPr>
-              <a:spcAft>
-                <a:spcPts val="600"/>
-              </a:spcAft>
-            </a:pPr>
-            <a:r>
-              <a:rPr sz="1500">
-                <a:solidFill>
-                  <a:srgbClr val="22282E"/>
-                </a:solidFill>
-              </a:rPr>
-              <a:t>•  Null session (SMB): conexión sin credenciales que en sistemas mal configurados revela usuarios y recursos.</a:t>
-            </a:r>
-          </a:p>
-          <a:p>
-            <a:pPr>
-              <a:spcAft>
-                <a:spcPts val="600"/>
-              </a:spcAft>
-            </a:pPr>
-            <a:r>
-              <a:rPr sz="1500">
-                <a:solidFill>
-                  <a:srgbClr val="22282E"/>
-                </a:solidFill>
-              </a:rPr>
-              <a:t>•  Transferencia de zona (AXFR): volcado completo de una zona DNS; si está mal permitida, expone todos los registros.</a:t>
-            </a:r>
-          </a:p>
-          <a:p>
-            <a:pPr>
-              <a:spcAft>
-                <a:spcPts val="600"/>
-              </a:spcAft>
-            </a:pPr>
-            <a:r>
-              <a:rPr sz="1500">
-                <a:solidFill>
-                  <a:srgbClr val="22282E"/>
-                </a:solidFill>
-              </a:rPr>
-              <a:t>•  Community string (SNMP): "contraseña" en claro (a menudo public/private) que da acceso de lectura/escritura a la MIB.</a:t>
-            </a:r>
-          </a:p>
-          <a:p>
-            <a:pPr>
-              <a:spcAft>
-                <a:spcPts val="600"/>
-              </a:spcAft>
-            </a:pPr>
-            <a:r>
-              <a:rPr sz="1500">
-                <a:solidFill>
-                  <a:srgbClr val="22282E"/>
-                </a:solidFill>
-              </a:rPr>
-              <a:t>•  VHost (Virtual Host): varios sitios en una misma IP diferenciados por cabecera Host; enumerarlos revela aplicaciones ocultas.</a:t>
+              <a:t>•  El escaneo responde qué hay; la enumeración responde qué me deja ver y hacer eso que</a:t>
+            </a:r>
+          </a:p>
+          <a:p>
+            <a:pPr>
+              <a:spcAft>
+                <a:spcPts val="600"/>
+              </a:spcAft>
+            </a:pPr>
+            <a:r>
+              <a:rPr sz="1500">
+                <a:solidFill>
+                  <a:srgbClr val="22282E"/>
+                </a:solidFill>
+              </a:rPr>
+              <a:t>•  hay. Es una diferencia de profundidad, no de herramienta: escanear el 445 te dice que</a:t>
+            </a:r>
+          </a:p>
+          <a:p>
+            <a:pPr>
+              <a:spcAft>
+                <a:spcPts val="600"/>
+              </a:spcAft>
+            </a:pPr>
+            <a:r>
+              <a:rPr sz="1500">
+                <a:solidFill>
+                  <a:srgbClr val="22282E"/>
+                </a:solidFill>
+              </a:rPr>
+              <a:t>•  hay SMB; enumerarlo te da la lista de comparticiones, los usuarios del dominio, la</a:t>
+            </a:r>
+          </a:p>
+          <a:p>
+            <a:pPr>
+              <a:spcAft>
+                <a:spcPts val="600"/>
+              </a:spcAft>
+            </a:pPr>
+            <a:r>
+              <a:rPr sz="1500">
+                <a:solidFill>
+                  <a:srgbClr val="22282E"/>
+                </a:solidFill>
+              </a:rPr>
+              <a:t>•  política de contraseñas y a veces un fichero de configuración con credenciales dentro.</a:t>
+            </a:r>
+          </a:p>
+          <a:p>
+            <a:pPr>
+              <a:spcAft>
+                <a:spcPts val="600"/>
+              </a:spcAft>
+            </a:pPr>
+            <a:r>
+              <a:rPr sz="1500">
+                <a:solidFill>
+                  <a:srgbClr val="22282E"/>
+                </a:solidFill>
+              </a:rPr>
+              <a:t>•  En la práctica profesional, la enumeración es la fase que más determina el resultado de</a:t>
+            </a:r>
+          </a:p>
+          <a:p>
+            <a:pPr>
+              <a:spcAft>
+                <a:spcPts val="600"/>
+              </a:spcAft>
+            </a:pPr>
+            <a:r>
+              <a:rPr sz="1500">
+                <a:solidFill>
+                  <a:srgbClr val="22282E"/>
+                </a:solidFill>
+              </a:rPr>
+              <a:t>•  un pentest, y la que más se hace mal por prisa.</a:t>
+            </a:r>
+          </a:p>
+          <a:p>
+            <a:pPr>
+              <a:spcAft>
+                <a:spcPts val="600"/>
+              </a:spcAft>
+            </a:pPr>
+            <a:r>
+              <a:rPr sz="1500">
+                <a:solidFill>
+                  <a:srgbClr val="22282E"/>
+                </a:solidFill>
+              </a:rPr>
+              <a:t>•  El método que funciona tiene tres propiedades. Es exhaustivo: no se salta un puerto</a:t>
             </a:r>
           </a:p>
         </p:txBody>
@@ -4256,7 +4632,7 @@
                   <a:srgbClr val="0B3D2E"/>
                 </a:solidFill>
               </a:rPr>
-              <a:t>🧰 Herramientas y preparación</a:t>
+              <a:t>📖 Definiciones y características</a:t>
             </a:r>
           </a:p>
         </p:txBody>
@@ -4294,82 +4670,67 @@
                   <a:srgbClr val="22282E"/>
                 </a:solidFill>
               </a:rPr>
-              <a:t>•  SMB: smbclient, enum4linux-ng, nmap scripts smb-, crackmapexec.</a:t>
-            </a:r>
-          </a:p>
-          <a:p>
-            <a:pPr>
-              <a:spcAft>
-                <a:spcPts val="600"/>
-              </a:spcAft>
-            </a:pPr>
-            <a:r>
-              <a:rPr sz="1500">
-                <a:solidFill>
-                  <a:srgbClr val="22282E"/>
-                </a:solidFill>
-              </a:rPr>
-              <a:t>•  HTTP: whatweb, gobuster/feroxbuster, nikto, curl.</a:t>
-            </a:r>
-          </a:p>
-          <a:p>
-            <a:pPr>
-              <a:spcAft>
-                <a:spcPts val="600"/>
-              </a:spcAft>
-            </a:pPr>
-            <a:r>
-              <a:rPr sz="1500">
-                <a:solidFill>
-                  <a:srgbClr val="22282E"/>
-                </a:solidFill>
-              </a:rPr>
-              <a:t>•  DNS: dig, dnsenum, dnsrecon.</a:t>
-            </a:r>
-          </a:p>
-          <a:p>
-            <a:pPr>
-              <a:spcAft>
-                <a:spcPts val="600"/>
-              </a:spcAft>
-            </a:pPr>
-            <a:r>
-              <a:rPr sz="1500">
-                <a:solidFill>
-                  <a:srgbClr val="22282E"/>
-                </a:solidFill>
-              </a:rPr>
-              <a:t>•  SNMP: snmpwalk, onesixtyone.</a:t>
-            </a:r>
-          </a:p>
-          <a:p>
-            <a:pPr>
-              <a:spcAft>
-                <a:spcPts val="600"/>
-              </a:spcAft>
-            </a:pPr>
-            <a:r>
-              <a:rPr sz="1500">
-                <a:solidFill>
-                  <a:srgbClr val="22282E"/>
-                </a:solidFill>
-              </a:rPr>
-              <a:t>•  SMTP/FTP/LDAP: smtp-user-enum, ftp, ldapsearch.</a:t>
-            </a:r>
-          </a:p>
-          <a:p>
-            <a:pPr>
-              <a:spcAft>
-                <a:spcPts val="600"/>
-              </a:spcAft>
-            </a:pPr>
-            <a:r>
-              <a:rPr sz="1500">
-                <a:solidFill>
-                  <a:srgbClr val="22282E"/>
-                </a:solidFill>
-              </a:rPr>
-              <a:t>•  Instalación típica en Kali: la mayoría vienen preinstaladas; si no, sudo apt install smbclient snmp dnsutils gobuster nikto.</a:t>
+              <a:t>•  Enumeración: proceso de interactuar con un servicio para extraer información detallada (usuarios, recursos, versiones, configuración) más allá de saber que existe.</a:t>
+            </a:r>
+          </a:p>
+          <a:p>
+            <a:pPr>
+              <a:spcAft>
+                <a:spcPts val="600"/>
+              </a:spcAft>
+            </a:pPr>
+            <a:r>
+              <a:rPr sz="1500">
+                <a:solidFill>
+                  <a:srgbClr val="22282E"/>
+                </a:solidFill>
+              </a:rPr>
+              <a:t>•  Null session (SMB): conexión sin credenciales que en sistemas mal configurados revela usuarios y recursos.</a:t>
+            </a:r>
+          </a:p>
+          <a:p>
+            <a:pPr>
+              <a:spcAft>
+                <a:spcPts val="600"/>
+              </a:spcAft>
+            </a:pPr>
+            <a:r>
+              <a:rPr sz="1500">
+                <a:solidFill>
+                  <a:srgbClr val="22282E"/>
+                </a:solidFill>
+              </a:rPr>
+              <a:t>•  Transferencia de zona (AXFR): volcado completo de una zona DNS; si está mal permitida, expone todos los registros.</a:t>
+            </a:r>
+          </a:p>
+          <a:p>
+            <a:pPr>
+              <a:spcAft>
+                <a:spcPts val="600"/>
+              </a:spcAft>
+            </a:pPr>
+            <a:r>
+              <a:rPr sz="1500">
+                <a:solidFill>
+                  <a:srgbClr val="22282E"/>
+                </a:solidFill>
+              </a:rPr>
+              <a:t>•  Community string (SNMP): "contraseña" en claro (a menudo public/private) que da acceso de lectura/escritura a la MIB.</a:t>
+            </a:r>
+          </a:p>
+          <a:p>
+            <a:pPr>
+              <a:spcAft>
+                <a:spcPts val="600"/>
+              </a:spcAft>
+            </a:pPr>
+            <a:r>
+              <a:rPr sz="1500">
+                <a:solidFill>
+                  <a:srgbClr val="22282E"/>
+                </a:solidFill>
+              </a:rPr>
+              <a:t>•  VHost (Virtual Host): varios sitios en una misma IP diferenciados por cabecera Host; enumerarlos revela aplicaciones ocultas.</a:t>
             </a:r>
           </a:p>
         </p:txBody>
@@ -4420,7 +4781,7 @@
                   <a:srgbClr val="0B3D2E"/>
                 </a:solidFill>
               </a:rPr>
-              <a:t>🧪 Laboratorio guiado</a:t>
+              <a:t>📔 Glosario</a:t>
             </a:r>
           </a:p>
         </p:txBody>
@@ -4458,97 +4819,97 @@
                   <a:srgbClr val="22282E"/>
                 </a:solidFill>
               </a:rPr>
-              <a:t>•  SMB — recursos y sistema:</a:t>
-            </a:r>
-          </a:p>
-          <a:p>
-            <a:pPr>
-              <a:spcAft>
-                <a:spcPts val="600"/>
-              </a:spcAft>
-            </a:pPr>
-            <a:r>
-              <a:rPr sz="1500">
-                <a:solidFill>
-                  <a:srgbClr val="22282E"/>
-                </a:solidFill>
-              </a:rPr>
-              <a:t>•  smbclient -L //192.168.56.101/ -N</a:t>
-            </a:r>
-          </a:p>
-          <a:p>
-            <a:pPr>
-              <a:spcAft>
-                <a:spcPts val="600"/>
-              </a:spcAft>
-            </a:pPr>
-            <a:r>
-              <a:rPr sz="1500">
-                <a:solidFill>
-                  <a:srgbClr val="22282E"/>
-                </a:solidFill>
-              </a:rPr>
-              <a:t>•  nmap -p445 --script smb-enum-shares,smb-enum-users,smb-os-discovery 192.168.56.101</a:t>
-            </a:r>
-          </a:p>
-          <a:p>
-            <a:pPr>
-              <a:spcAft>
-                <a:spcPts val="600"/>
-              </a:spcAft>
-            </a:pPr>
-            <a:r>
-              <a:rPr sz="1500">
-                <a:solidFill>
-                  <a:srgbClr val="22282E"/>
-                </a:solidFill>
-              </a:rPr>
-              <a:t>•  enum4linux-ng -A 192.168.56.101</a:t>
-            </a:r>
-          </a:p>
-          <a:p>
-            <a:pPr>
-              <a:spcAft>
-                <a:spcPts val="600"/>
-              </a:spcAft>
-            </a:pPr>
-            <a:r>
-              <a:rPr sz="1500">
-                <a:solidFill>
-                  <a:srgbClr val="22282E"/>
-                </a:solidFill>
-              </a:rPr>
-              <a:t>•  HTTP — tecnologías y directorios:</a:t>
-            </a:r>
-          </a:p>
-          <a:p>
-            <a:pPr>
-              <a:spcAft>
-                <a:spcPts val="600"/>
-              </a:spcAft>
-            </a:pPr>
-            <a:r>
-              <a:rPr sz="1500">
-                <a:solidFill>
-                  <a:srgbClr val="22282E"/>
-                </a:solidFill>
-              </a:rPr>
-              <a:t>•  whatweb http://192.168.56.101/</a:t>
-            </a:r>
-          </a:p>
-          <a:p>
-            <a:pPr>
-              <a:spcAft>
-                <a:spcPts val="600"/>
-              </a:spcAft>
-            </a:pPr>
-            <a:r>
-              <a:rPr sz="1500">
-                <a:solidFill>
-                  <a:srgbClr val="22282E"/>
-                </a:solidFill>
-              </a:rPr>
-              <a:t>•  gobuster dir -u http://192.168.56.101/ -w /usr/share/wordlists/dirb/common.txt -t 30</a:t>
+              <a:t>•  Término — Definición concisa</a:t>
+            </a:r>
+          </a:p>
+          <a:p>
+            <a:pPr>
+              <a:spcAft>
+                <a:spcPts val="600"/>
+              </a:spcAft>
+            </a:pPr>
+            <a:r>
+              <a:rPr sz="1500">
+                <a:solidFill>
+                  <a:srgbClr val="22282E"/>
+                </a:solidFill>
+              </a:rPr>
+              <a:t>•  Enumeración — Extraer información detallada de un servicio ya identificado</a:t>
+            </a:r>
+          </a:p>
+          <a:p>
+            <a:pPr>
+              <a:spcAft>
+                <a:spcPts val="600"/>
+              </a:spcAft>
+            </a:pPr>
+            <a:r>
+              <a:rPr sz="1500">
+                <a:solidFill>
+                  <a:srgbClr val="22282E"/>
+                </a:solidFill>
+              </a:rPr>
+              <a:t>•  Sesión nula — Conexión SMB sin credenciales que revela usuarios y recursos</a:t>
+            </a:r>
+          </a:p>
+          <a:p>
+            <a:pPr>
+              <a:spcAft>
+                <a:spcPts val="600"/>
+              </a:spcAft>
+            </a:pPr>
+            <a:r>
+              <a:rPr sz="1500">
+                <a:solidFill>
+                  <a:srgbClr val="22282E"/>
+                </a:solidFill>
+              </a:rPr>
+              <a:t>•  Compartición (share) — Recurso de red publicado por SMB</a:t>
+            </a:r>
+          </a:p>
+          <a:p>
+            <a:pPr>
+              <a:spcAft>
+                <a:spcPts val="600"/>
+              </a:spcAft>
+            </a:pPr>
+            <a:r>
+              <a:rPr sz="1500">
+                <a:solidFill>
+                  <a:srgbClr val="22282E"/>
+                </a:solidFill>
+              </a:rPr>
+              <a:t>•  SMBv1 — Dialecto obsoleto e inseguro; su presencia ya es un hallazgo</a:t>
+            </a:r>
+          </a:p>
+          <a:p>
+            <a:pPr>
+              <a:spcAft>
+                <a:spcPts val="600"/>
+              </a:spcAft>
+            </a:pPr>
+            <a:r>
+              <a:rPr sz="1500">
+                <a:solidFill>
+                  <a:srgbClr val="22282E"/>
+                </a:solidFill>
+              </a:rPr>
+              <a:t>•  AXFR — Transferencia de zona DNS; entrega la zona completa</a:t>
+            </a:r>
+          </a:p>
+          <a:p>
+            <a:pPr>
+              <a:spcAft>
+                <a:spcPts val="600"/>
+              </a:spcAft>
+            </a:pPr>
+            <a:r>
+              <a:rPr sz="1500">
+                <a:solidFill>
+                  <a:srgbClr val="22282E"/>
+                </a:solidFill>
+              </a:rPr>
+              <a:t>•  Cadena de comunidad — "Contraseña" de SNMP; public y private son los valores por defecto</a:t>
             </a:r>
           </a:p>
         </p:txBody>
@@ -4599,7 +4960,7 @@
                   <a:srgbClr val="0B3D2E"/>
                 </a:solidFill>
               </a:rPr>
-              <a:t>✍️ Ejercicios</a:t>
+              <a:t>🧰 Herramientas y preparación</a:t>
             </a:r>
           </a:p>
         </p:txBody>
@@ -4637,82 +4998,82 @@
                   <a:srgbClr val="22282E"/>
                 </a:solidFill>
               </a:rPr>
-              <a:t>•  Enumera los recursos SMB del objetivo y determina cuáles permiten acceso anónimo.</a:t>
-            </a:r>
-          </a:p>
-          <a:p>
-            <a:pPr>
-              <a:spcAft>
-                <a:spcPts val="600"/>
-              </a:spcAft>
-            </a:pPr>
-            <a:r>
-              <a:rPr sz="1500">
-                <a:solidFill>
-                  <a:srgbClr val="22282E"/>
-                </a:solidFill>
-              </a:rPr>
-              <a:t>•  Con gobuster, encuentra al menos dos directorios no enlazados desde la página principal.</a:t>
-            </a:r>
-          </a:p>
-          <a:p>
-            <a:pPr>
-              <a:spcAft>
-                <a:spcPts val="600"/>
-              </a:spcAft>
-            </a:pPr>
-            <a:r>
-              <a:rPr sz="1500">
-                <a:solidFill>
-                  <a:srgbClr val="22282E"/>
-                </a:solidFill>
-              </a:rPr>
-              <a:t>•  Intenta una transferencia de zona AXFR y explica el riesgo si tiene éxito.</a:t>
-            </a:r>
-          </a:p>
-          <a:p>
-            <a:pPr>
-              <a:spcAft>
-                <a:spcPts val="600"/>
-              </a:spcAft>
-            </a:pPr>
-            <a:r>
-              <a:rPr sz="1500">
-                <a:solidFill>
-                  <a:srgbClr val="22282E"/>
-                </a:solidFill>
-              </a:rPr>
-              <a:t>•  Haz snmpwalk y localiza el nombre del sistema y la tabla de procesos.</a:t>
-            </a:r>
-          </a:p>
-          <a:p>
-            <a:pPr>
-              <a:spcAft>
-                <a:spcPts val="600"/>
-              </a:spcAft>
-            </a:pPr>
-            <a:r>
-              <a:rPr sz="1500">
-                <a:solidFill>
-                  <a:srgbClr val="22282E"/>
-                </a:solidFill>
-              </a:rPr>
-              <a:t>•  Enumera usuarios por SMTP con VRFY y explica por qué muchos servidores lo desactivan.</a:t>
-            </a:r>
-          </a:p>
-          <a:p>
-            <a:pPr>
-              <a:spcAft>
-                <a:spcPts val="600"/>
-              </a:spcAft>
-            </a:pPr>
-            <a:r>
-              <a:rPr sz="1500">
-                <a:solidFill>
-                  <a:srgbClr val="22282E"/>
-                </a:solidFill>
-              </a:rPr>
-              <a:t>•  Usa whatweb y curl -I para inventariar el stack tecnológico de un sitio.</a:t>
+              <a:t>•  SMB: smbclient, enum4linux-ng, nmap scripts smb-, crackmapexec.</a:t>
+            </a:r>
+          </a:p>
+          <a:p>
+            <a:pPr>
+              <a:spcAft>
+                <a:spcPts val="600"/>
+              </a:spcAft>
+            </a:pPr>
+            <a:r>
+              <a:rPr sz="1500">
+                <a:solidFill>
+                  <a:srgbClr val="22282E"/>
+                </a:solidFill>
+              </a:rPr>
+              <a:t>•  HTTP: whatweb, gobuster/feroxbuster, nikto, curl.</a:t>
+            </a:r>
+          </a:p>
+          <a:p>
+            <a:pPr>
+              <a:spcAft>
+                <a:spcPts val="600"/>
+              </a:spcAft>
+            </a:pPr>
+            <a:r>
+              <a:rPr sz="1500">
+                <a:solidFill>
+                  <a:srgbClr val="22282E"/>
+                </a:solidFill>
+              </a:rPr>
+              <a:t>•  DNS: dig, dnsenum, dnsrecon.</a:t>
+            </a:r>
+          </a:p>
+          <a:p>
+            <a:pPr>
+              <a:spcAft>
+                <a:spcPts val="600"/>
+              </a:spcAft>
+            </a:pPr>
+            <a:r>
+              <a:rPr sz="1500">
+                <a:solidFill>
+                  <a:srgbClr val="22282E"/>
+                </a:solidFill>
+              </a:rPr>
+              <a:t>•  SNMP: snmpwalk, onesixtyone.</a:t>
+            </a:r>
+          </a:p>
+          <a:p>
+            <a:pPr>
+              <a:spcAft>
+                <a:spcPts val="600"/>
+              </a:spcAft>
+            </a:pPr>
+            <a:r>
+              <a:rPr sz="1500">
+                <a:solidFill>
+                  <a:srgbClr val="22282E"/>
+                </a:solidFill>
+              </a:rPr>
+              <a:t>•  SMTP/FTP/LDAP: smtp-user-enum, ftp, ldapsearch.</a:t>
+            </a:r>
+          </a:p>
+          <a:p>
+            <a:pPr>
+              <a:spcAft>
+                <a:spcPts val="600"/>
+              </a:spcAft>
+            </a:pPr>
+            <a:r>
+              <a:rPr sz="1500">
+                <a:solidFill>
+                  <a:srgbClr val="22282E"/>
+                </a:solidFill>
+              </a:rPr>
+              <a:t>•  Instalación típica en Kali: la mayoría vienen preinstaladas; si no, sudo apt install smbclient snmp dnsutils gobuster nikto.</a:t>
             </a:r>
           </a:p>
         </p:txBody>
@@ -4763,7 +5124,7 @@
                   <a:srgbClr val="0B3D2E"/>
                 </a:solidFill>
               </a:rPr>
-              <a:t>📝 Reto verificable</a:t>
+              <a:t>🧪 Laboratorio guiado</a:t>
             </a:r>
           </a:p>
         </p:txBody>
@@ -4801,22 +5162,97 @@
                   <a:srgbClr val="22282E"/>
                 </a:solidFill>
               </a:rPr>
-              <a:t>•  Elabora una "hoja de enumeración" de un host multiservicio de laboratorio que documente, por cada servicio abierto: versión, información sensible obtenida (recursos, usuarios, registros, directorios) y al menos un vector de ataque potencial priorizado. Entrega las notas y los comandos usados.</a:t>
-            </a:r>
-          </a:p>
-          <a:p>
-            <a:pPr>
-              <a:spcAft>
-                <a:spcPts val="600"/>
-              </a:spcAft>
-            </a:pPr>
-            <a:r>
-              <a:rPr sz="1500">
-                <a:solidFill>
-                  <a:srgbClr val="22282E"/>
-                </a:solidFill>
-              </a:rPr>
-              <a:t>•  Criterio de aceptación: la hoja cubre todos los servicios abiertos que el revisor conoce, cada hallazgo es reproducible con el comando indicado y el vector priorizado es coherente con la información obtenida.</a:t>
+              <a:t>•  SMB — recursos y sistema:</a:t>
+            </a:r>
+          </a:p>
+          <a:p>
+            <a:pPr>
+              <a:spcAft>
+                <a:spcPts val="600"/>
+              </a:spcAft>
+            </a:pPr>
+            <a:r>
+              <a:rPr sz="1500">
+                <a:solidFill>
+                  <a:srgbClr val="22282E"/>
+                </a:solidFill>
+              </a:rPr>
+              <a:t>•  HTTP — tecnologías y directorios:</a:t>
+            </a:r>
+          </a:p>
+          <a:p>
+            <a:pPr>
+              <a:spcAft>
+                <a:spcPts val="600"/>
+              </a:spcAft>
+            </a:pPr>
+            <a:r>
+              <a:rPr sz="1500">
+                <a:solidFill>
+                  <a:srgbClr val="22282E"/>
+                </a:solidFill>
+              </a:rPr>
+              <a:t>•  DNS — registros y transferencia de zona:</a:t>
+            </a:r>
+          </a:p>
+          <a:p>
+            <a:pPr>
+              <a:spcAft>
+                <a:spcPts val="600"/>
+              </a:spcAft>
+            </a:pPr>
+            <a:r>
+              <a:rPr sz="1500">
+                <a:solidFill>
+                  <a:srgbClr val="22282E"/>
+                </a:solidFill>
+              </a:rPr>
+              <a:t>•  SNMP:</a:t>
+            </a:r>
+          </a:p>
+          <a:p>
+            <a:pPr>
+              <a:spcAft>
+                <a:spcPts val="600"/>
+              </a:spcAft>
+            </a:pPr>
+            <a:r>
+              <a:rPr sz="1500">
+                <a:solidFill>
+                  <a:srgbClr val="22282E"/>
+                </a:solidFill>
+              </a:rPr>
+              <a:t>•  SMTP — enumeración de usuarios:</a:t>
+            </a:r>
+          </a:p>
+          <a:p>
+            <a:pPr>
+              <a:spcAft>
+                <a:spcPts val="600"/>
+              </a:spcAft>
+            </a:pPr>
+            <a:r>
+              <a:rPr sz="1500">
+                <a:solidFill>
+                  <a:srgbClr val="22282E"/>
+                </a:solidFill>
+              </a:rPr>
+              <a:t>•  FTP anónimo:</a:t>
+            </a:r>
+          </a:p>
+          <a:p>
+            <a:pPr>
+              <a:spcAft>
+                <a:spcPts val="600"/>
+              </a:spcAft>
+            </a:pPr>
+            <a:r>
+              <a:rPr sz="1500">
+                <a:solidFill>
+                  <a:srgbClr val="22282E"/>
+                </a:solidFill>
+              </a:rPr>
+              <a:t>•  Documenta cada hallazgo en un archivo por servicio (notas-smb.md, notas-http.md, …).</a:t>
             </a:r>
           </a:p>
         </p:txBody>
